--- a/Customer Complaints.pptx
+++ b/Customer Complaints.pptx
@@ -129,7 +129,7 @@
   <pc:docChgLst>
     <pc:chgData name="Muchammad Wildan Alkautsar" userId="360672ed2ee56274" providerId="LiveId" clId="{F5771622-C242-4EFB-9359-41E4DFBD7538}"/>
     <pc:docChg chg="undo custSel addSld modSld sldOrd">
-      <pc:chgData name="Muchammad Wildan Alkautsar" userId="360672ed2ee56274" providerId="LiveId" clId="{F5771622-C242-4EFB-9359-41E4DFBD7538}" dt="2026-10-23T06:19:58.941" v="1250" actId="14100"/>
+      <pc:chgData name="Muchammad Wildan Alkautsar" userId="360672ed2ee56274" providerId="LiveId" clId="{F5771622-C242-4EFB-9359-41E4DFBD7538}" dt="2026-10-23T06:50:23.009" v="1252" actId="27918"/>
       <pc:docMkLst>
         <pc:docMk/>
       </pc:docMkLst>
@@ -397,7 +397,7 @@
         </pc:spChg>
       </pc:sldChg>
       <pc:sldChg chg="addSp modSp new mod">
-        <pc:chgData name="Muchammad Wildan Alkautsar" userId="360672ed2ee56274" providerId="LiveId" clId="{F5771622-C242-4EFB-9359-41E4DFBD7538}" dt="2026-10-23T06:19:58.941" v="1250" actId="14100"/>
+        <pc:chgData name="Muchammad Wildan Alkautsar" userId="360672ed2ee56274" providerId="LiveId" clId="{F5771622-C242-4EFB-9359-41E4DFBD7538}" dt="2026-10-23T06:50:23.009" v="1252" actId="27918"/>
         <pc:sldMkLst>
           <pc:docMk/>
           <pc:sldMk cId="2686190554" sldId="265"/>
@@ -13880,7 +13880,7 @@
               <p:nvPr>
                 <p:extLst>
                   <p:ext uri="{D42A27DB-BD31-4B8C-83A1-F6EECF244321}">
-                    <p14:modId xmlns:p14="http://schemas.microsoft.com/office/powerpoint/2010/main" val="2640785214"/>
+                    <p14:modId xmlns:p14="http://schemas.microsoft.com/office/powerpoint/2010/main" val="3884209143"/>
                   </p:ext>
                 </p:extLst>
               </p:nvPr>
